--- a/presentacion/grabazo.pptx
+++ b/presentacion/grabazo.pptx
@@ -6548,7 +6548,7 @@
                 </a:solidFill>
                 <a:latin typeface="Arial"/>
               </a:rPr>
-              <a:t>68 comprobaciones con la extensión real y un celular conectado, más 51 del estudio (recortes, cortes y exportación).</a:t>
+              <a:t>77 comprobaciones con la extensión real y un celular conectado, más 51 del estudio (recortes, cortes y exportación).</a:t>
             </a:r>
           </a:p>
         </p:txBody>

--- a/presentacion/grabazo.pptx
+++ b/presentacion/grabazo.pptx
@@ -6333,7 +6333,7 @@
                 </a:solidFill>
                 <a:latin typeface="Arial"/>
               </a:rPr>
-              <a:t>ESTADO · VERSIÓN 1.0.0</a:t>
+              <a:t>ESTADO · VERSIÓN 1.1.0</a:t>
             </a:r>
           </a:p>
         </p:txBody>
@@ -6548,7 +6548,7 @@
                 </a:solidFill>
                 <a:latin typeface="Arial"/>
               </a:rPr>
-              <a:t>77 comprobaciones con la extensión real y un celular conectado, más 51 del estudio (recortes, cortes y exportación).</a:t>
+              <a:t>102 comprobaciones con la extensión real y un celular conectado, más 51 del estudio (recortes, cortes y exportación).</a:t>
             </a:r>
           </a:p>
         </p:txBody>
@@ -6724,7 +6724,7 @@
                 </a:solidFill>
                 <a:latin typeface="Arial"/>
               </a:rPr>
-              <a:t>dist/grabazo-1.0.0.zip para la Chrome Web Store, Manifest V3, con acceso a sitios opcional.</a:t>
+              <a:t>dist/grabazo-1.1.0.zip para la Chrome Web Store, Manifest V3, con acceso a sitios opcional.</a:t>
             </a:r>
           </a:p>
         </p:txBody>
@@ -6939,7 +6939,7 @@
                 </a:solidFill>
                 <a:latin typeface="Arial"/>
               </a:rPr>
-              <a:t>Siguiente paso: publicar la página del celular en mjmc4498.github.io/grabazo, la landing en grabazo.com y subir el ZIP 1.0.0 en el panel del desarrollador.</a:t>
+              <a:t>Siguiente paso: publicar la página del celular en mjmc4498.github.io/grabazo, la landing en grabazo.com y subir el ZIP 1.1.0 en el panel del desarrollador.</a:t>
             </a:r>
           </a:p>
         </p:txBody>
@@ -10448,7 +10448,7 @@
                 </a:solidFill>
                 <a:latin typeface="Arial"/>
               </a:rPr>
-              <a:t>Sobre todas las apps</a:t>
+              <a:t>Dentro del video</a:t>
             </a:r>
           </a:p>
         </p:txBody>
@@ -10487,14 +10487,14 @@
                 </a:solidFill>
                 <a:latin typeface="Arial"/>
               </a:rPr>
-              <a:t>Ventana flotante al grabar la pantalla completa.</a:t>
+              <a:t>En ventana y pantalla: la ubicas antes de grabar y la mueves al grabar.</a:t>
             </a:r>
           </a:p>
         </p:txBody>
       </p:sp>
       <p:pic>
         <p:nvPicPr>
-          <p:cNvPr id="17" name="Picture 16" descr="grabando-dibujos-r.png"/>
+          <p:cNvPr id="17" name="Picture 16" descr="ubicar-camara-r.png"/>
           <p:cNvPicPr>
             <a:picLocks noChangeAspect="1"/>
           </p:cNvPicPr>
@@ -10509,7 +10509,7 @@
         <p:spPr>
           <a:xfrm>
             <a:off x="5852160" y="1737360"/>
-            <a:ext cx="5852160" cy="3474720"/>
+            <a:ext cx="5852160" cy="2281351"/>
           </a:xfrm>
           <a:prstGeom prst="rect">
             <a:avLst/>

--- a/presentacion/grabazo.pptx
+++ b/presentacion/grabazo.pptx
@@ -6333,7 +6333,7 @@
                 </a:solidFill>
                 <a:latin typeface="Arial"/>
               </a:rPr>
-              <a:t>ESTADO · VERSIÓN 1.1.0</a:t>
+              <a:t>ESTADO · VERSIÓN 1.2.0</a:t>
             </a:r>
           </a:p>
         </p:txBody>
@@ -6548,7 +6548,7 @@
                 </a:solidFill>
                 <a:latin typeface="Arial"/>
               </a:rPr>
-              <a:t>102 comprobaciones con la extensión real y un celular conectado, más 51 del estudio (recortes, cortes y exportación).</a:t>
+              <a:t>107 comprobaciones con la extensión real y un celular conectado, más 51 del estudio (recortes, cortes y exportación).</a:t>
             </a:r>
           </a:p>
         </p:txBody>
@@ -6724,7 +6724,7 @@
                 </a:solidFill>
                 <a:latin typeface="Arial"/>
               </a:rPr>
-              <a:t>dist/grabazo-1.1.0.zip para la Chrome Web Store, Manifest V3, con acceso a sitios opcional.</a:t>
+              <a:t>dist/grabazo-1.2.0.zip para la Chrome Web Store, Manifest V3, con acceso a sitios opcional.</a:t>
             </a:r>
           </a:p>
         </p:txBody>
@@ -6939,7 +6939,7 @@
                 </a:solidFill>
                 <a:latin typeface="Arial"/>
               </a:rPr>
-              <a:t>Siguiente paso: publicar la página del celular en mjmc4498.github.io/grabazo, la landing en grabazo.com y subir el ZIP 1.1.0 en el panel del desarrollador.</a:t>
+              <a:t>Siguiente paso: publicar la página del celular en mjmc4498.github.io/grabazo, la landing en grabazo.com y subir el ZIP 1.2.0 en el panel del desarrollador.</a:t>
             </a:r>
           </a:p>
         </p:txBody>
@@ -9229,7 +9229,7 @@
         <p:spPr>
           <a:xfrm>
             <a:off x="8183879" y="502920"/>
-            <a:ext cx="2909236" cy="5943600"/>
+            <a:ext cx="2756882" cy="5943600"/>
           </a:xfrm>
           <a:prstGeom prst="rect">
             <a:avLst/>
@@ -9472,7 +9472,7 @@
                 </a:solidFill>
                 <a:latin typeface="Arial"/>
               </a:rPr>
-              <a:t>Hasta 4K y 60 cuadros por segundo, en MP4 o WebM.</a:t>
+              <a:t>Calidad al grabar: Auto, 720p, 1080p, 1440p o 4K, por hardware.</a:t>
             </a:r>
           </a:p>
         </p:txBody>
@@ -9881,7 +9881,7 @@
         <p:spPr>
           <a:xfrm>
             <a:off x="9509760" y="1097280"/>
-            <a:ext cx="2506419" cy="5120640"/>
+            <a:ext cx="2375160" cy="5120640"/>
           </a:xfrm>
           <a:prstGeom prst="rect">
             <a:avLst/>
@@ -12315,7 +12315,7 @@
         <p:spPr>
           <a:xfrm>
             <a:off x="9646920" y="914400"/>
-            <a:ext cx="1918306" cy="5120640"/>
+            <a:ext cx="1734862" cy="5120640"/>
           </a:xfrm>
           <a:prstGeom prst="rect">
             <a:avLst/>
